--- a/presentation.pptx
+++ b/presentation.pptx
@@ -8,17 +8,21 @@
     <p:notesMasterId r:id="rId4"/>
   </p:notesMasterIdLst>
   <p:handoutMasterIdLst>
-    <p:handoutMasterId r:id="rId7"/>
+    <p:handoutMasterId r:id="rId11"/>
   </p:handoutMasterIdLst>
   <p:sldIdLst>
     <p:sldId id="273" r:id="rId3"/>
     <p:sldId id="270" r:id="rId5"/>
-    <p:sldId id="274" r:id="rId6"/>
+    <p:sldId id="276" r:id="rId6"/>
+    <p:sldId id="275" r:id="rId7"/>
+    <p:sldId id="278" r:id="rId8"/>
+    <p:sldId id="277" r:id="rId9"/>
+    <p:sldId id="274" r:id="rId10"/>
   </p:sldIdLst>
   <p:sldSz cx="12192000" cy="6858000"/>
   <p:notesSz cx="6858000" cy="9144000"/>
   <p:custDataLst>
-    <p:tags r:id="rId12"/>
+    <p:tags r:id="rId16"/>
   </p:custDataLst>
   <p:defaultTextStyle>
     <a:defPPr rtl="0">
@@ -123,7 +127,7 @@
             <a:srgbClr val="A4A3A4"/>
           </p15:clr>
         </p15:guide>
-        <p15:guide id="2" pos="3840" userDrawn="1">
+        <p15:guide id="2" pos="3824" userDrawn="1">
           <p15:clr>
             <a:srgbClr val="A4A3A4"/>
           </p15:clr>
@@ -844,6 +848,75 @@
 </file>
 
 <file path=ppt/notesSlides/notesSlide3.xml><?xml version="1.0" encoding="utf-8"?>
+<p:notes xmlns:a="http://schemas.openxmlformats.org/drawingml/2006/main" xmlns:r="http://schemas.openxmlformats.org/officeDocument/2006/relationships" xmlns:p="http://schemas.openxmlformats.org/presentationml/2006/main">
+  <p:cSld>
+    <p:spTree>
+      <p:nvGrpSpPr>
+        <p:cNvPr id="1" name=""/>
+        <p:cNvGrpSpPr/>
+        <p:nvPr/>
+      </p:nvGrpSpPr>
+      <p:grpSpPr/>
+      <p:sp>
+        <p:nvSpPr>
+          <p:cNvPr id="2" name="幻灯片图像占位符 1"/>
+          <p:cNvSpPr>
+            <a:spLocks noGrp="1"/>
+          </p:cNvSpPr>
+          <p:nvPr>
+            <p:ph type="sldImg" idx="2"/>
+          </p:nvPr>
+        </p:nvSpPr>
+        <p:spPr/>
+      </p:sp>
+      <p:sp>
+        <p:nvSpPr>
+          <p:cNvPr id="3" name="文本占位符 2"/>
+          <p:cNvSpPr>
+            <a:spLocks noGrp="1"/>
+          </p:cNvSpPr>
+          <p:nvPr>
+            <p:ph type="body" idx="3"/>
+          </p:nvPr>
+        </p:nvSpPr>
+        <p:spPr/>
+        <p:txBody>
+          <a:bodyPr/>
+          <a:p>
+            <a:endParaRPr lang="zh-CN" altLang="en-US"/>
+          </a:p>
+        </p:txBody>
+      </p:sp>
+      <p:sp>
+        <p:nvSpPr>
+          <p:cNvPr id="4" name="灯片编号占位符 3"/>
+          <p:cNvSpPr>
+            <a:spLocks noGrp="1"/>
+          </p:cNvSpPr>
+          <p:nvPr>
+            <p:ph type="sldNum" sz="quarter" idx="5"/>
+          </p:nvPr>
+        </p:nvSpPr>
+        <p:spPr/>
+        <p:txBody>
+          <a:bodyPr/>
+          <a:p>
+            <a:fld id="{DF61EA0F-A667-4B49-8422-0062BC55E249}" type="slidenum">
+              <a:rPr lang="en-US" smtClean="0"/>
+            </a:fld>
+            <a:endParaRPr lang="en-US" dirty="0"/>
+          </a:p>
+        </p:txBody>
+      </p:sp>
+    </p:spTree>
+  </p:cSld>
+  <p:clrMapOvr>
+    <a:masterClrMapping/>
+  </p:clrMapOvr>
+</p:notes>
+</file>
+
+<file path=ppt/notesSlides/notesSlide4.xml><?xml version="1.0" encoding="utf-8"?>
 <p:notes xmlns:a="http://schemas.openxmlformats.org/drawingml/2006/main" xmlns:r="http://schemas.openxmlformats.org/officeDocument/2006/relationships" xmlns:p="http://schemas.openxmlformats.org/presentationml/2006/main">
   <p:cSld>
     <p:spTree>
@@ -2196,7 +2269,7 @@
                 <a:cs typeface="Arial" panose="020B0604020202020204" pitchFamily="34" charset="0"/>
                 <a:sym typeface="Wingdings" panose="05000000000000000000" pitchFamily="2" charset="2"/>
               </a:rPr>
-              <a:t>：姓名</a:t>
+              <a:t>：王若菡</a:t>
             </a:r>
             <a:r>
               <a:rPr lang="en-US" altLang="zh-CN" sz="2400" dirty="0">
@@ -2216,7 +2289,7 @@
                 <a:cs typeface="Arial" panose="020B0604020202020204" pitchFamily="34" charset="0"/>
                 <a:sym typeface="Wingdings" panose="05000000000000000000" pitchFamily="2" charset="2"/>
               </a:rPr>
-              <a:t>班级</a:t>
+              <a:t>软国</a:t>
             </a:r>
             <a:r>
               <a:rPr lang="en-US" altLang="zh-CN" sz="2400" dirty="0">
@@ -2226,7 +2299,7 @@
                 <a:cs typeface="Arial" panose="020B0604020202020204" pitchFamily="34" charset="0"/>
                 <a:sym typeface="Wingdings" panose="05000000000000000000" pitchFamily="2" charset="2"/>
               </a:rPr>
-              <a:t> QQ</a:t>
+              <a:t>2510 3484055326</a:t>
             </a:r>
             <a:endParaRPr lang="en-US" altLang="zh-CN" sz="2400" dirty="0">
               <a:solidFill>
@@ -2255,7 +2328,7 @@
                 </a:solidFill>
                 <a:cs typeface="Arial" panose="020B0604020202020204" pitchFamily="34" charset="0"/>
               </a:rPr>
-              <a:t>2026.XX.XX</a:t>
+              <a:t>2026.03.08</a:t>
             </a:r>
             <a:endParaRPr lang="en-US" sz="2400" dirty="0">
               <a:solidFill>
@@ -2313,10 +2386,297 @@
               <a:rPr lang="zh-CN" altLang="en-US" sz="4800" dirty="0">
                 <a:cs typeface="Arial" panose="020B0604020202020204" pitchFamily="34" charset="0"/>
               </a:rPr>
-              <a:t>子标题</a:t>
+              <a:t>目录</a:t>
             </a:r>
             <a:endParaRPr lang="zh-CN" altLang="en-US" sz="4800" dirty="0">
               <a:cs typeface="Arial" panose="020B0604020202020204" pitchFamily="34" charset="0"/>
+            </a:endParaRPr>
+          </a:p>
+        </p:txBody>
+      </p:sp>
+      <p:sp>
+        <p:nvSpPr>
+          <p:cNvPr id="3" name="文本框 2"/>
+          <p:cNvSpPr txBox="1"/>
+          <p:nvPr/>
+        </p:nvSpPr>
+        <p:spPr>
+          <a:xfrm>
+            <a:off x="891540" y="1772920"/>
+            <a:ext cx="4064000" cy="2584450"/>
+          </a:xfrm>
+          <a:prstGeom prst="rect">
+            <a:avLst/>
+          </a:prstGeom>
+          <a:noFill/>
+        </p:spPr>
+        <p:txBody>
+          <a:bodyPr wrap="square" rtlCol="0">
+            <a:spAutoFit/>
+          </a:bodyPr>
+          <a:p>
+            <a:r>
+              <a:rPr lang="en-US" altLang="zh-CN" b="1" kern="0" spc="70" dirty="0">
+                <a:solidFill>
+                  <a:srgbClr val="000000">
+                    <a:alpha val="100000"/>
+                  </a:srgbClr>
+                </a:solidFill>
+                <a:latin typeface="WPS灵秀黑" charset="-122"/>
+                <a:ea typeface="WPS灵秀黑" charset="-122"/>
+                <a:cs typeface="黑体" panose="02010609060101010101" charset="-122"/>
+                <a:sym typeface="+mn-ea"/>
+              </a:rPr>
+              <a:t>1. </a:t>
+            </a:r>
+            <a:r>
+              <a:rPr lang="zh-CN" altLang="zh-CN" b="1" kern="0" spc="70" dirty="0">
+                <a:solidFill>
+                  <a:srgbClr val="000000">
+                    <a:alpha val="100000"/>
+                  </a:srgbClr>
+                </a:solidFill>
+                <a:latin typeface="WPS灵秀黑" charset="-122"/>
+                <a:ea typeface="WPS灵秀黑" charset="-122"/>
+                <a:cs typeface="黑体" panose="02010609060101010101" charset="-122"/>
+                <a:sym typeface="+mn-ea"/>
+              </a:rPr>
+              <a:t>项目展示</a:t>
+            </a:r>
+            <a:endParaRPr lang="zh-CN" altLang="zh-CN" b="1" kern="0" spc="70" dirty="0">
+              <a:solidFill>
+                <a:srgbClr val="000000">
+                  <a:alpha val="100000"/>
+                </a:srgbClr>
+              </a:solidFill>
+              <a:latin typeface="WPS灵秀黑" charset="-122"/>
+              <a:ea typeface="WPS灵秀黑" charset="-122"/>
+              <a:cs typeface="黑体" panose="02010609060101010101" charset="-122"/>
+              <a:sym typeface="+mn-ea"/>
+            </a:endParaRPr>
+          </a:p>
+          <a:p>
+            <a:endParaRPr lang="zh-CN" altLang="zh-CN" b="1" kern="0" spc="70" dirty="0">
+              <a:solidFill>
+                <a:srgbClr val="000000">
+                  <a:alpha val="100000"/>
+                </a:srgbClr>
+              </a:solidFill>
+              <a:latin typeface="WPS灵秀黑" charset="-122"/>
+              <a:ea typeface="WPS灵秀黑" charset="-122"/>
+              <a:cs typeface="黑体" panose="02010609060101010101" charset="-122"/>
+              <a:sym typeface="+mn-ea"/>
+            </a:endParaRPr>
+          </a:p>
+          <a:p>
+            <a:r>
+              <a:rPr lang="en-US" altLang="zh-CN" b="1" kern="0" spc="70" dirty="0">
+                <a:solidFill>
+                  <a:srgbClr val="000000">
+                    <a:alpha val="100000"/>
+                  </a:srgbClr>
+                </a:solidFill>
+                <a:latin typeface="WPS灵秀黑" charset="-122"/>
+                <a:ea typeface="WPS灵秀黑" charset="-122"/>
+                <a:cs typeface="黑体" panose="02010609060101010101" charset="-122"/>
+                <a:sym typeface="+mn-ea"/>
+              </a:rPr>
+              <a:t>2. </a:t>
+            </a:r>
+            <a:r>
+              <a:rPr lang="zh-CN" altLang="zh-CN" b="1" kern="0" spc="70" dirty="0">
+                <a:solidFill>
+                  <a:srgbClr val="000000">
+                    <a:alpha val="100000"/>
+                  </a:srgbClr>
+                </a:solidFill>
+                <a:latin typeface="WPS灵秀黑" charset="-122"/>
+                <a:ea typeface="WPS灵秀黑" charset="-122"/>
+                <a:cs typeface="黑体" panose="02010609060101010101" charset="-122"/>
+                <a:sym typeface="+mn-ea"/>
+              </a:rPr>
+              <a:t>任务设计思路</a:t>
+            </a:r>
+            <a:endParaRPr lang="zh-CN" altLang="zh-CN" b="1" kern="0" spc="70" dirty="0">
+              <a:solidFill>
+                <a:srgbClr val="000000">
+                  <a:alpha val="100000"/>
+                </a:srgbClr>
+              </a:solidFill>
+              <a:latin typeface="WPS灵秀黑" charset="-122"/>
+              <a:ea typeface="WPS灵秀黑" charset="-122"/>
+              <a:cs typeface="黑体" panose="02010609060101010101" charset="-122"/>
+              <a:sym typeface="+mn-ea"/>
+            </a:endParaRPr>
+          </a:p>
+          <a:p>
+            <a:endParaRPr dirty="0">
+              <a:latin typeface="WPS灵秀黑" charset="-122"/>
+              <a:ea typeface="WPS灵秀黑" charset="-122"/>
+              <a:cs typeface="黑体" panose="02010609060101010101" charset="-122"/>
+            </a:endParaRPr>
+          </a:p>
+          <a:p>
+            <a:r>
+              <a:rPr lang="en-US" altLang="zh-CN" b="1" kern="0" spc="70" dirty="0">
+                <a:solidFill>
+                  <a:srgbClr val="000000">
+                    <a:alpha val="100000"/>
+                  </a:srgbClr>
+                </a:solidFill>
+                <a:latin typeface="WPS灵秀黑" charset="-122"/>
+                <a:ea typeface="WPS灵秀黑" charset="-122"/>
+                <a:cs typeface="黑体" panose="02010609060101010101" charset="-122"/>
+                <a:sym typeface="+mn-ea"/>
+              </a:rPr>
+              <a:t>3. </a:t>
+            </a:r>
+            <a:r>
+              <a:rPr lang="zh-CN" altLang="en-US" b="1" kern="0" spc="70" dirty="0">
+                <a:solidFill>
+                  <a:srgbClr val="000000">
+                    <a:alpha val="100000"/>
+                  </a:srgbClr>
+                </a:solidFill>
+                <a:latin typeface="WPS灵秀黑" charset="-122"/>
+                <a:ea typeface="WPS灵秀黑" charset="-122"/>
+                <a:cs typeface="黑体" panose="02010609060101010101" charset="-122"/>
+                <a:sym typeface="+mn-ea"/>
+              </a:rPr>
+              <a:t>程序流程图</a:t>
+            </a:r>
+            <a:endParaRPr lang="zh-CN" altLang="en-US" b="1" kern="0" spc="70" dirty="0">
+              <a:solidFill>
+                <a:srgbClr val="000000">
+                  <a:alpha val="100000"/>
+                </a:srgbClr>
+              </a:solidFill>
+              <a:latin typeface="WPS灵秀黑" charset="-122"/>
+              <a:ea typeface="WPS灵秀黑" charset="-122"/>
+              <a:cs typeface="黑体" panose="02010609060101010101" charset="-122"/>
+              <a:sym typeface="+mn-ea"/>
+            </a:endParaRPr>
+          </a:p>
+          <a:p>
+            <a:endParaRPr lang="en-US" altLang="zh-CN" b="1" kern="0" spc="70" dirty="0">
+              <a:solidFill>
+                <a:srgbClr val="000000">
+                  <a:alpha val="100000"/>
+                </a:srgbClr>
+              </a:solidFill>
+              <a:latin typeface="WPS灵秀黑" charset="-122"/>
+              <a:ea typeface="WPS灵秀黑" charset="-122"/>
+              <a:cs typeface="黑体" panose="02010609060101010101" charset="-122"/>
+              <a:sym typeface="+mn-ea"/>
+            </a:endParaRPr>
+          </a:p>
+          <a:p>
+            <a:r>
+              <a:rPr lang="en-US" altLang="zh-CN" b="1" kern="0" spc="70" dirty="0">
+                <a:solidFill>
+                  <a:srgbClr val="000000">
+                    <a:alpha val="100000"/>
+                  </a:srgbClr>
+                </a:solidFill>
+                <a:latin typeface="WPS灵秀黑" charset="-122"/>
+                <a:ea typeface="WPS灵秀黑" charset="-122"/>
+                <a:cs typeface="黑体" panose="02010609060101010101" charset="-122"/>
+                <a:sym typeface="+mn-ea"/>
+              </a:rPr>
+              <a:t>4. </a:t>
+            </a:r>
+            <a:r>
+              <a:rPr lang="zh-CN" altLang="en-US" b="1" kern="0" spc="70" dirty="0">
+                <a:solidFill>
+                  <a:srgbClr val="000000">
+                    <a:alpha val="100000"/>
+                  </a:srgbClr>
+                </a:solidFill>
+                <a:latin typeface="WPS灵秀黑" charset="-122"/>
+                <a:ea typeface="WPS灵秀黑" charset="-122"/>
+                <a:cs typeface="黑体" panose="02010609060101010101" charset="-122"/>
+                <a:sym typeface="+mn-ea"/>
+              </a:rPr>
+              <a:t>项目总结</a:t>
+            </a:r>
+            <a:endParaRPr lang="zh-CN" altLang="en-US" b="1" kern="0" spc="70" dirty="0">
+              <a:solidFill>
+                <a:srgbClr val="000000">
+                  <a:alpha val="100000"/>
+                </a:srgbClr>
+              </a:solidFill>
+              <a:latin typeface="WPS灵秀黑" charset="-122"/>
+              <a:ea typeface="WPS灵秀黑" charset="-122"/>
+              <a:cs typeface="黑体" panose="02010609060101010101" charset="-122"/>
+              <a:sym typeface="+mn-ea"/>
+            </a:endParaRPr>
+          </a:p>
+          <a:p>
+            <a:endParaRPr lang="en-US" altLang="zh-CN" b="1" kern="0" spc="70" dirty="0">
+              <a:solidFill>
+                <a:srgbClr val="000000">
+                  <a:alpha val="100000"/>
+                </a:srgbClr>
+              </a:solidFill>
+              <a:latin typeface="WPS灵秀黑" charset="-122"/>
+              <a:ea typeface="WPS灵秀黑" charset="-122"/>
+              <a:cs typeface="黑体" panose="02010609060101010101" charset="-122"/>
+              <a:sym typeface="+mn-ea"/>
+            </a:endParaRPr>
+          </a:p>
+          <a:p>
+            <a:r>
+              <a:rPr lang="en-US" altLang="zh-CN" b="1" kern="0" spc="70" dirty="0">
+                <a:solidFill>
+                  <a:srgbClr val="000000">
+                    <a:alpha val="100000"/>
+                  </a:srgbClr>
+                </a:solidFill>
+                <a:latin typeface="WPS灵秀黑" charset="-122"/>
+                <a:ea typeface="WPS灵秀黑" charset="-122"/>
+                <a:cs typeface="黑体" panose="02010609060101010101" charset="-122"/>
+                <a:sym typeface="+mn-ea"/>
+              </a:rPr>
+              <a:t>5. </a:t>
+            </a:r>
+            <a:r>
+              <a:rPr lang="zh-CN" altLang="en-US" b="1" kern="0" spc="70" dirty="0">
+                <a:solidFill>
+                  <a:srgbClr val="000000">
+                    <a:alpha val="100000"/>
+                  </a:srgbClr>
+                </a:solidFill>
+                <a:latin typeface="WPS灵秀黑" charset="-122"/>
+                <a:ea typeface="WPS灵秀黑" charset="-122"/>
+                <a:cs typeface="黑体" panose="02010609060101010101" charset="-122"/>
+                <a:sym typeface="+mn-ea"/>
+              </a:rPr>
+              <a:t>新学期的个人规划和</a:t>
+            </a:r>
+            <a:r>
+              <a:rPr lang="zh-CN" altLang="en-US" b="1" kern="0" spc="70" dirty="0">
+                <a:solidFill>
+                  <a:srgbClr val="000000">
+                    <a:alpha val="100000"/>
+                  </a:srgbClr>
+                </a:solidFill>
+                <a:latin typeface="WPS灵秀黑" charset="-122"/>
+                <a:ea typeface="WPS灵秀黑" charset="-122"/>
+                <a:cs typeface="黑体" panose="02010609060101010101" charset="-122"/>
+                <a:sym typeface="+mn-ea"/>
+              </a:rPr>
+              <a:t>展望</a:t>
+            </a:r>
+            <a:endParaRPr lang="zh-CN" altLang="en-US" b="1" kern="0" spc="70" dirty="0">
+              <a:solidFill>
+                <a:srgbClr val="000000">
+                  <a:alpha val="100000"/>
+                </a:srgbClr>
+              </a:solidFill>
+              <a:latin typeface="WPS灵秀黑" charset="-122"/>
+              <a:ea typeface="WPS灵秀黑" charset="-122"/>
+              <a:cs typeface="黑体" panose="02010609060101010101" charset="-122"/>
+              <a:sym typeface="+mn-ea"/>
             </a:endParaRPr>
           </a:p>
         </p:txBody>
@@ -2338,6 +2698,1300 @@
         <p:cNvGrpSpPr/>
         <p:nvPr/>
       </p:nvGrpSpPr>
+      <p:grpSpPr/>
+      <p:sp>
+        <p:nvSpPr>
+          <p:cNvPr id="2" name="标题 1"/>
+          <p:cNvSpPr>
+            <a:spLocks noGrp="1"/>
+          </p:cNvSpPr>
+          <p:nvPr>
+            <p:ph type="title"/>
+          </p:nvPr>
+        </p:nvSpPr>
+        <p:spPr/>
+        <p:txBody>
+          <a:bodyPr/>
+          <a:p>
+            <a:r>
+              <a:rPr lang="zh-CN" altLang="en-US"/>
+              <a:t>任务设计思路</a:t>
+            </a:r>
+            <a:endParaRPr lang="zh-CN" altLang="en-US"/>
+          </a:p>
+        </p:txBody>
+      </p:sp>
+      <p:sp>
+        <p:nvSpPr>
+          <p:cNvPr id="3" name="内容占位符 2"/>
+          <p:cNvSpPr>
+            <a:spLocks noGrp="1"/>
+          </p:cNvSpPr>
+          <p:nvPr>
+            <p:ph idx="1"/>
+          </p:nvPr>
+        </p:nvSpPr>
+        <p:spPr>
+          <a:xfrm>
+            <a:off x="839470" y="1268730"/>
+            <a:ext cx="10863580" cy="5196205"/>
+          </a:xfrm>
+        </p:spPr>
+        <p:txBody>
+          <a:bodyPr>
+            <a:normAutofit/>
+          </a:bodyPr>
+          <a:p>
+            <a:r>
+              <a:rPr lang="zh-CN">
+                <a:solidFill>
+                  <a:srgbClr val="D24726"/>
+                </a:solidFill>
+                <a:sym typeface="+mn-ea"/>
+              </a:rPr>
+              <a:t>任务一 &amp; 二 | Git 与基础自测</a:t>
+            </a:r>
+            <a:r>
+              <a:rPr lang="zh-CN">
+                <a:solidFill>
+                  <a:srgbClr val="000000"/>
+                </a:solidFill>
+                <a:sym typeface="+mn-ea"/>
+              </a:rPr>
+              <a:t> </a:t>
+            </a:r>
+            <a:endParaRPr lang="zh-CN">
+              <a:solidFill>
+                <a:srgbClr val="000000"/>
+              </a:solidFill>
+              <a:sym typeface="+mn-ea"/>
+            </a:endParaRPr>
+          </a:p>
+          <a:p>
+            <a:r>
+              <a:rPr lang="en-US" altLang="zh-CN">
+                <a:solidFill>
+                  <a:srgbClr val="000000"/>
+                </a:solidFill>
+                <a:sym typeface="+mn-ea"/>
+              </a:rPr>
+              <a:t>• </a:t>
+            </a:r>
+            <a:r>
+              <a:rPr lang="zh-CN" altLang="zh-CN">
+                <a:solidFill>
+                  <a:srgbClr val="000000"/>
+                </a:solidFill>
+                <a:sym typeface="+mn-ea"/>
+              </a:rPr>
+              <a:t>熟悉</a:t>
+            </a:r>
+            <a:r>
+              <a:rPr lang="en-US" altLang="zh-CN">
+                <a:solidFill>
+                  <a:srgbClr val="000000"/>
+                </a:solidFill>
+                <a:sym typeface="+mn-ea"/>
+              </a:rPr>
+              <a:t>git</a:t>
+            </a:r>
+            <a:r>
+              <a:rPr lang="zh-CN" altLang="zh-CN">
+                <a:solidFill>
+                  <a:srgbClr val="000000"/>
+                </a:solidFill>
+                <a:sym typeface="+mn-ea"/>
+              </a:rPr>
+              <a:t>和</a:t>
+            </a:r>
+            <a:r>
+              <a:rPr lang="en-US" altLang="zh-CN">
+                <a:solidFill>
+                  <a:srgbClr val="000000"/>
+                </a:solidFill>
+                <a:sym typeface="+mn-ea"/>
+              </a:rPr>
+              <a:t>github</a:t>
+            </a:r>
+            <a:r>
+              <a:rPr lang="zh-CN" altLang="zh-CN">
+                <a:solidFill>
+                  <a:srgbClr val="000000"/>
+                </a:solidFill>
+                <a:sym typeface="+mn-ea"/>
+              </a:rPr>
+              <a:t>使用流程，学习</a:t>
+            </a:r>
+            <a:r>
+              <a:rPr lang="en-US" altLang="zh-CN">
+                <a:solidFill>
+                  <a:srgbClr val="000000"/>
+                </a:solidFill>
+                <a:sym typeface="+mn-ea"/>
+              </a:rPr>
+              <a:t>HTML/CSS/JS </a:t>
+            </a:r>
+            <a:endParaRPr lang="en-US" altLang="zh-CN">
+              <a:solidFill>
+                <a:srgbClr val="000000"/>
+              </a:solidFill>
+              <a:sym typeface="+mn-ea"/>
+            </a:endParaRPr>
+          </a:p>
+          <a:p>
+            <a:r>
+              <a:rPr lang="zh-CN" altLang="en-US">
+                <a:solidFill>
+                  <a:srgbClr val="D24726"/>
+                </a:solidFill>
+              </a:rPr>
+              <a:t>任务三</a:t>
+            </a:r>
+            <a:r>
+              <a:rPr lang="en-US" altLang="zh-CN">
+                <a:solidFill>
+                  <a:srgbClr val="D24726"/>
+                </a:solidFill>
+              </a:rPr>
+              <a:t> | </a:t>
+            </a:r>
+            <a:r>
+              <a:rPr lang="zh-CN" altLang="en-US">
+                <a:solidFill>
+                  <a:srgbClr val="D24726"/>
+                </a:solidFill>
+              </a:rPr>
+              <a:t>项目实战</a:t>
+            </a:r>
+            <a:endParaRPr lang="zh-CN" altLang="en-US">
+              <a:solidFill>
+                <a:srgbClr val="D24726"/>
+              </a:solidFill>
+            </a:endParaRPr>
+          </a:p>
+          <a:p>
+            <a:r>
+              <a:rPr lang="en-US" altLang="zh-CN">
+                <a:solidFill>
+                  <a:srgbClr val="000000"/>
+                </a:solidFill>
+                <a:sym typeface="+mn-ea"/>
+              </a:rPr>
+              <a:t>• </a:t>
+            </a:r>
+            <a:r>
+              <a:rPr lang="zh-CN" altLang="en-US">
+                <a:solidFill>
+                  <a:srgbClr val="000000"/>
+                </a:solidFill>
+                <a:sym typeface="+mn-ea"/>
+              </a:rPr>
+              <a:t>任务拆解</a:t>
+            </a:r>
+            <a:r>
+              <a:rPr lang="en-US" altLang="zh-CN">
+                <a:solidFill>
+                  <a:srgbClr val="000000"/>
+                </a:solidFill>
+                <a:sym typeface="+mn-ea"/>
+              </a:rPr>
+              <a:t> </a:t>
+            </a:r>
+            <a:r>
+              <a:rPr lang="zh-CN" altLang="en-US">
+                <a:solidFill>
+                  <a:srgbClr val="000000"/>
+                </a:solidFill>
+                <a:sym typeface="+mn-ea"/>
+              </a:rPr>
+              <a:t>：</a:t>
+            </a:r>
+            <a:r>
+              <a:rPr lang="zh-CN" altLang="en-US">
+                <a:solidFill>
+                  <a:schemeClr val="tx1"/>
+                </a:solidFill>
+              </a:rPr>
+              <a:t>将项目拆分为结构层</a:t>
+            </a:r>
+            <a:r>
+              <a:rPr lang="en-US" altLang="zh-CN">
+                <a:solidFill>
+                  <a:schemeClr val="tx1"/>
+                </a:solidFill>
+              </a:rPr>
+              <a:t> (HTML)</a:t>
+            </a:r>
+            <a:r>
+              <a:rPr lang="zh-CN" altLang="en-US">
+                <a:solidFill>
+                  <a:schemeClr val="tx1"/>
+                </a:solidFill>
+              </a:rPr>
+              <a:t>、表现层</a:t>
+            </a:r>
+            <a:r>
+              <a:rPr lang="en-US" altLang="zh-CN">
+                <a:solidFill>
+                  <a:schemeClr val="tx1"/>
+                </a:solidFill>
+              </a:rPr>
+              <a:t> (CSS) </a:t>
+            </a:r>
+            <a:r>
+              <a:rPr lang="zh-CN" altLang="en-US">
+                <a:solidFill>
+                  <a:schemeClr val="tx1"/>
+                </a:solidFill>
+              </a:rPr>
+              <a:t>和逻辑层</a:t>
+            </a:r>
+            <a:r>
+              <a:rPr lang="en-US" altLang="zh-CN">
+                <a:solidFill>
+                  <a:schemeClr val="tx1"/>
+                </a:solidFill>
+              </a:rPr>
+              <a:t> (JS)</a:t>
+            </a:r>
+            <a:endParaRPr lang="en-US" altLang="zh-CN">
+              <a:solidFill>
+                <a:schemeClr val="tx1"/>
+              </a:solidFill>
+            </a:endParaRPr>
+          </a:p>
+          <a:p>
+            <a:r>
+              <a:rPr lang="en-US" altLang="zh-CN">
+                <a:solidFill>
+                  <a:srgbClr val="000000"/>
+                </a:solidFill>
+                <a:sym typeface="+mn-ea"/>
+              </a:rPr>
+              <a:t>• </a:t>
+            </a:r>
+            <a:r>
+              <a:rPr lang="zh-CN" altLang="en-US">
+                <a:solidFill>
+                  <a:srgbClr val="000000"/>
+                </a:solidFill>
+                <a:sym typeface="+mn-ea"/>
+              </a:rPr>
+              <a:t>执行</a:t>
+            </a:r>
+            <a:r>
+              <a:rPr lang="en-US" altLang="zh-CN">
+                <a:solidFill>
+                  <a:srgbClr val="000000"/>
+                </a:solidFill>
+                <a:sym typeface="+mn-ea"/>
+              </a:rPr>
+              <a:t> </a:t>
+            </a:r>
+            <a:r>
+              <a:rPr lang="zh-CN" altLang="en-US">
+                <a:solidFill>
+                  <a:srgbClr val="000000"/>
+                </a:solidFill>
+                <a:sym typeface="+mn-ea"/>
+              </a:rPr>
+              <a:t>：</a:t>
+            </a:r>
+            <a:r>
+              <a:rPr lang="en-US" altLang="zh-CN">
+                <a:solidFill>
+                  <a:srgbClr val="000000"/>
+                </a:solidFill>
+                <a:sym typeface="+mn-ea"/>
+              </a:rPr>
+              <a:t>1.</a:t>
+            </a:r>
+            <a:r>
+              <a:rPr lang="zh-CN" altLang="en-US">
+                <a:solidFill>
+                  <a:srgbClr val="000000"/>
+                </a:solidFill>
+                <a:sym typeface="+mn-ea"/>
+              </a:rPr>
+              <a:t>依据官方网页将页面拆解为三个主要部分</a:t>
+            </a:r>
+            <a:r>
+              <a:rPr lang="en-US" altLang="zh-CN">
+                <a:solidFill>
+                  <a:srgbClr val="000000"/>
+                </a:solidFill>
+                <a:sym typeface="+mn-ea"/>
+              </a:rPr>
+              <a:t>(</a:t>
+            </a:r>
+            <a:r>
+              <a:rPr lang="zh-CN" altLang="en-US">
+                <a:solidFill>
+                  <a:srgbClr val="000000"/>
+                </a:solidFill>
+                <a:sym typeface="+mn-ea"/>
+              </a:rPr>
+              <a:t>顶部导航栏，中部输入框和键盘，底部页脚</a:t>
+            </a:r>
+            <a:r>
+              <a:rPr lang="en-US" altLang="zh-CN">
+                <a:solidFill>
+                  <a:srgbClr val="000000"/>
+                </a:solidFill>
+                <a:sym typeface="+mn-ea"/>
+              </a:rPr>
+              <a:t>)</a:t>
+            </a:r>
+            <a:r>
+              <a:rPr lang="zh-CN" altLang="en-US">
+                <a:solidFill>
+                  <a:srgbClr val="000000"/>
+                </a:solidFill>
+                <a:sym typeface="+mn-ea"/>
+              </a:rPr>
+              <a:t>与一个小组件</a:t>
+            </a:r>
+            <a:r>
+              <a:rPr lang="en-US" altLang="zh-CN">
+                <a:solidFill>
+                  <a:srgbClr val="000000"/>
+                </a:solidFill>
+                <a:sym typeface="+mn-ea"/>
+              </a:rPr>
+              <a:t>(</a:t>
+            </a:r>
+            <a:r>
+              <a:rPr lang="zh-CN" altLang="en-US">
+                <a:solidFill>
+                  <a:srgbClr val="000000"/>
+                </a:solidFill>
+                <a:sym typeface="+mn-ea"/>
+              </a:rPr>
+              <a:t>右侧答</a:t>
+            </a:r>
+            <a:r>
+              <a:rPr lang="en-US" altLang="zh-CN">
+                <a:solidFill>
+                  <a:srgbClr val="000000"/>
+                </a:solidFill>
+                <a:sym typeface="+mn-ea"/>
+              </a:rPr>
+              <a:t>                  </a:t>
+            </a:r>
+            <a:r>
+              <a:rPr lang="zh-CN" altLang="en-US">
+                <a:solidFill>
+                  <a:srgbClr val="000000"/>
+                </a:solidFill>
+                <a:sym typeface="+mn-ea"/>
+              </a:rPr>
+              <a:t>案与重置</a:t>
+            </a:r>
+            <a:r>
+              <a:rPr lang="en-US" altLang="zh-CN">
+                <a:solidFill>
+                  <a:srgbClr val="000000"/>
+                </a:solidFill>
+                <a:sym typeface="+mn-ea"/>
+              </a:rPr>
+              <a:t>)</a:t>
+            </a:r>
+            <a:r>
+              <a:rPr lang="zh-CN" altLang="en-US">
+                <a:solidFill>
+                  <a:srgbClr val="000000"/>
+                </a:solidFill>
+                <a:sym typeface="+mn-ea"/>
+              </a:rPr>
+              <a:t>，以便还原静态页面</a:t>
+            </a:r>
+            <a:r>
+              <a:rPr lang="en-US" altLang="zh-CN">
+                <a:solidFill>
+                  <a:srgbClr val="000000"/>
+                </a:solidFill>
+                <a:sym typeface="+mn-ea"/>
+              </a:rPr>
+              <a:t>(HTML,CSS)       2.JS</a:t>
+            </a:r>
+            <a:r>
+              <a:rPr lang="zh-CN" altLang="en-US">
+                <a:solidFill>
+                  <a:srgbClr val="000000"/>
+                </a:solidFill>
+                <a:sym typeface="+mn-ea"/>
+              </a:rPr>
+              <a:t>功能实现：键盘监听，保证物理和虚拟键盘都可以实时塞进变量及出现在格子里；</a:t>
+            </a:r>
+            <a:r>
+              <a:rPr lang="en-US" altLang="zh-CN">
+                <a:solidFill>
+                  <a:srgbClr val="000000"/>
+                </a:solidFill>
+                <a:sym typeface="+mn-ea"/>
+              </a:rPr>
+              <a:t>  </a:t>
+            </a:r>
+            <a:r>
+              <a:rPr lang="zh-CN" altLang="en-US">
+                <a:solidFill>
+                  <a:srgbClr val="000000"/>
+                </a:solidFill>
+                <a:sym typeface="+mn-ea"/>
+              </a:rPr>
+              <a:t>判定：两遍扫描，先挑选字母与位置都正确的格子标绿，再挑选字母正确的格子标黄，剩下的保持灰色，并且虚拟键盘同步变化，注意！键盘中标绿的字母不会再变化：</a:t>
+            </a:r>
+            <a:r>
+              <a:rPr lang="en-US" altLang="zh-CN">
+                <a:solidFill>
+                  <a:srgbClr val="000000"/>
+                </a:solidFill>
+                <a:sym typeface="+mn-ea"/>
+              </a:rPr>
+              <a:t>  </a:t>
+            </a:r>
+            <a:r>
+              <a:rPr lang="zh-CN" altLang="en-US">
+                <a:solidFill>
+                  <a:srgbClr val="000000"/>
+                </a:solidFill>
+                <a:sym typeface="+mn-ea"/>
+              </a:rPr>
+              <a:t>动画实现：按下</a:t>
+            </a:r>
+            <a:r>
+              <a:rPr lang="en-US" altLang="zh-CN">
+                <a:solidFill>
+                  <a:srgbClr val="000000"/>
+                </a:solidFill>
+                <a:sym typeface="+mn-ea"/>
+              </a:rPr>
+              <a:t>enter</a:t>
+            </a:r>
+            <a:r>
+              <a:rPr lang="zh-CN" altLang="en-US">
+                <a:solidFill>
+                  <a:srgbClr val="000000"/>
+                </a:solidFill>
+                <a:sym typeface="+mn-ea"/>
+              </a:rPr>
+              <a:t>后翻页</a:t>
+            </a:r>
+            <a:r>
+              <a:rPr lang="zh-CN" altLang="en-US">
+                <a:solidFill>
+                  <a:srgbClr val="000000"/>
+                </a:solidFill>
+                <a:sym typeface="+mn-ea"/>
+              </a:rPr>
+              <a:t>动画</a:t>
+            </a:r>
+            <a:endParaRPr lang="zh-CN" altLang="en-US">
+              <a:solidFill>
+                <a:srgbClr val="000000"/>
+              </a:solidFill>
+              <a:sym typeface="+mn-ea"/>
+            </a:endParaRPr>
+          </a:p>
+          <a:p>
+            <a:r>
+              <a:rPr lang="zh-CN" altLang="en-US">
+                <a:solidFill>
+                  <a:srgbClr val="D24726"/>
+                </a:solidFill>
+                <a:sym typeface="+mn-ea"/>
+              </a:rPr>
+              <a:t>任务四</a:t>
+            </a:r>
+            <a:r>
+              <a:rPr lang="en-US" altLang="zh-CN">
+                <a:solidFill>
+                  <a:srgbClr val="D24726"/>
+                </a:solidFill>
+                <a:sym typeface="+mn-ea"/>
+              </a:rPr>
+              <a:t> | AI </a:t>
+            </a:r>
+            <a:r>
+              <a:rPr lang="zh-CN" altLang="en-US">
+                <a:solidFill>
+                  <a:srgbClr val="D24726"/>
+                </a:solidFill>
+                <a:sym typeface="+mn-ea"/>
+              </a:rPr>
+              <a:t>使用情况说明</a:t>
+            </a:r>
+            <a:endParaRPr lang="zh-CN" altLang="en-US">
+              <a:solidFill>
+                <a:srgbClr val="D24726"/>
+              </a:solidFill>
+              <a:sym typeface="+mn-ea"/>
+            </a:endParaRPr>
+          </a:p>
+          <a:p>
+            <a:r>
+              <a:rPr lang="en-US" altLang="zh-CN">
+                <a:solidFill>
+                  <a:srgbClr val="000000"/>
+                </a:solidFill>
+                <a:sym typeface="+mn-ea"/>
+              </a:rPr>
+              <a:t>• </a:t>
+            </a:r>
+            <a:r>
+              <a:rPr lang="zh-CN" altLang="en-US">
+                <a:solidFill>
+                  <a:srgbClr val="000000"/>
+                </a:solidFill>
+                <a:sym typeface="+mn-ea"/>
+              </a:rPr>
+              <a:t>主要使用的</a:t>
+            </a:r>
+            <a:r>
+              <a:rPr lang="en-US" altLang="zh-CN">
+                <a:solidFill>
+                  <a:srgbClr val="000000"/>
+                </a:solidFill>
+                <a:sym typeface="+mn-ea"/>
+              </a:rPr>
+              <a:t>AI</a:t>
+            </a:r>
+            <a:r>
+              <a:rPr lang="zh-CN" altLang="en-US">
+                <a:solidFill>
+                  <a:srgbClr val="000000"/>
+                </a:solidFill>
+                <a:sym typeface="+mn-ea"/>
+              </a:rPr>
+              <a:t>：</a:t>
+            </a:r>
+            <a:r>
+              <a:rPr lang="en-US" altLang="zh-CN">
+                <a:solidFill>
+                  <a:srgbClr val="000000"/>
+                </a:solidFill>
+                <a:sym typeface="+mn-ea"/>
+              </a:rPr>
+              <a:t>Gemini</a:t>
+            </a:r>
+            <a:r>
+              <a:rPr lang="zh-CN" altLang="en-US">
+                <a:solidFill>
+                  <a:srgbClr val="000000"/>
+                </a:solidFill>
+                <a:sym typeface="+mn-ea"/>
+              </a:rPr>
+              <a:t>，</a:t>
+            </a:r>
+            <a:r>
+              <a:rPr lang="en-US" altLang="zh-CN">
+                <a:solidFill>
+                  <a:srgbClr val="000000"/>
+                </a:solidFill>
+                <a:sym typeface="+mn-ea"/>
+              </a:rPr>
+              <a:t>ChatGPT</a:t>
+            </a:r>
+            <a:endParaRPr lang="en-US" altLang="zh-CN">
+              <a:solidFill>
+                <a:srgbClr val="000000"/>
+              </a:solidFill>
+              <a:sym typeface="+mn-ea"/>
+            </a:endParaRPr>
+          </a:p>
+        </p:txBody>
+      </p:sp>
+    </p:spTree>
+  </p:cSld>
+  <p:clrMapOvr>
+    <a:masterClrMapping/>
+  </p:clrMapOvr>
+</p:sld>
+</file>
+
+<file path=ppt/slides/slide4.xml><?xml version="1.0" encoding="utf-8"?>
+<p:sld xmlns:a="http://schemas.openxmlformats.org/drawingml/2006/main" xmlns:r="http://schemas.openxmlformats.org/officeDocument/2006/relationships" xmlns:p="http://schemas.openxmlformats.org/presentationml/2006/main">
+  <p:cSld>
+    <p:spTree>
+      <p:nvGrpSpPr>
+        <p:cNvPr id="1" name=""/>
+        <p:cNvGrpSpPr/>
+        <p:nvPr/>
+      </p:nvGrpSpPr>
+      <p:grpSpPr/>
+      <p:sp>
+        <p:nvSpPr>
+          <p:cNvPr id="2" name="标题 1"/>
+          <p:cNvSpPr>
+            <a:spLocks noGrp="1"/>
+          </p:cNvSpPr>
+          <p:nvPr>
+            <p:ph type="title"/>
+          </p:nvPr>
+        </p:nvSpPr>
+        <p:spPr/>
+        <p:txBody>
+          <a:bodyPr/>
+          <a:p>
+            <a:r>
+              <a:rPr lang="zh-CN" altLang="en-US"/>
+              <a:t>程序流程图</a:t>
+            </a:r>
+            <a:endParaRPr lang="zh-CN" altLang="en-US"/>
+          </a:p>
+        </p:txBody>
+      </p:sp>
+      <p:pic>
+        <p:nvPicPr>
+          <p:cNvPr id="7" name="内容占位符 6" descr="Word Guessing Game Flow-2026-03-07-151719"/>
+          <p:cNvPicPr>
+            <a:picLocks noChangeAspect="1"/>
+          </p:cNvPicPr>
+          <p:nvPr>
+            <p:ph idx="1"/>
+          </p:nvPr>
+        </p:nvPicPr>
+        <p:blipFill>
+          <a:blip r:embed="rId1"/>
+          <a:stretch>
+            <a:fillRect/>
+          </a:stretch>
+        </p:blipFill>
+        <p:spPr>
+          <a:xfrm>
+            <a:off x="386080" y="927735"/>
+            <a:ext cx="7704455" cy="5794375"/>
+          </a:xfrm>
+          <a:prstGeom prst="rect">
+            <a:avLst/>
+          </a:prstGeom>
+        </p:spPr>
+      </p:pic>
+      <p:sp>
+        <p:nvSpPr>
+          <p:cNvPr id="8" name="文本框 7"/>
+          <p:cNvSpPr txBox="1"/>
+          <p:nvPr/>
+        </p:nvSpPr>
+        <p:spPr>
+          <a:xfrm>
+            <a:off x="7896225" y="1196340"/>
+            <a:ext cx="4064000" cy="645160"/>
+          </a:xfrm>
+          <a:prstGeom prst="rect">
+            <a:avLst/>
+          </a:prstGeom>
+          <a:noFill/>
+        </p:spPr>
+        <p:txBody>
+          <a:bodyPr wrap="square" rtlCol="0">
+            <a:spAutoFit/>
+          </a:bodyPr>
+          <a:p>
+            <a:r>
+              <a:rPr lang="zh-CN" altLang="en-US"/>
+              <a:t>一</a:t>
+            </a:r>
+            <a:r>
+              <a:rPr lang="en-US" altLang="zh-CN"/>
+              <a:t>.</a:t>
+            </a:r>
+            <a:r>
+              <a:rPr lang="zh-CN" altLang="en-US"/>
+              <a:t>开始，整个程序从</a:t>
+            </a:r>
+            <a:r>
+              <a:rPr lang="en-US" altLang="zh-CN"/>
+              <a:t>start</a:t>
+            </a:r>
+            <a:r>
+              <a:rPr lang="zh-CN" altLang="en-US"/>
+              <a:t>开始，进行初始化，连接词库与随机选取</a:t>
+            </a:r>
+            <a:r>
+              <a:rPr lang="zh-CN" altLang="en-US"/>
+              <a:t>答案</a:t>
+            </a:r>
+            <a:endParaRPr lang="zh-CN" altLang="en-US"/>
+          </a:p>
+        </p:txBody>
+      </p:sp>
+      <p:sp>
+        <p:nvSpPr>
+          <p:cNvPr id="9" name="文本框 8"/>
+          <p:cNvSpPr txBox="1"/>
+          <p:nvPr/>
+        </p:nvSpPr>
+        <p:spPr>
+          <a:xfrm>
+            <a:off x="7896225" y="2348865"/>
+            <a:ext cx="4064000" cy="645160"/>
+          </a:xfrm>
+          <a:prstGeom prst="rect">
+            <a:avLst/>
+          </a:prstGeom>
+          <a:noFill/>
+        </p:spPr>
+        <p:txBody>
+          <a:bodyPr wrap="square" rtlCol="0">
+            <a:spAutoFit/>
+          </a:bodyPr>
+          <a:p>
+            <a:r>
+              <a:rPr lang="zh-CN" altLang="en-US"/>
+              <a:t>二</a:t>
+            </a:r>
+            <a:r>
+              <a:rPr lang="en-US" altLang="zh-CN"/>
+              <a:t>.</a:t>
+            </a:r>
+            <a:r>
+              <a:rPr lang="zh-CN" altLang="en-US"/>
+              <a:t>交互，负责将输入情况转化为数据进行</a:t>
+            </a:r>
+            <a:r>
+              <a:rPr lang="zh-CN" altLang="en-US"/>
+              <a:t>处理</a:t>
+            </a:r>
+            <a:endParaRPr lang="zh-CN" altLang="en-US"/>
+          </a:p>
+        </p:txBody>
+      </p:sp>
+      <p:sp>
+        <p:nvSpPr>
+          <p:cNvPr id="10" name="文本框 9"/>
+          <p:cNvSpPr txBox="1"/>
+          <p:nvPr/>
+        </p:nvSpPr>
+        <p:spPr>
+          <a:xfrm>
+            <a:off x="7896225" y="3500755"/>
+            <a:ext cx="4064000" cy="645160"/>
+          </a:xfrm>
+          <a:prstGeom prst="rect">
+            <a:avLst/>
+          </a:prstGeom>
+          <a:noFill/>
+        </p:spPr>
+        <p:txBody>
+          <a:bodyPr wrap="square" rtlCol="0">
+            <a:spAutoFit/>
+          </a:bodyPr>
+          <a:p>
+            <a:r>
+              <a:rPr lang="zh-CN" altLang="en-US"/>
+              <a:t>三</a:t>
+            </a:r>
+            <a:r>
+              <a:rPr lang="en-US" altLang="zh-CN"/>
+              <a:t>.</a:t>
+            </a:r>
+            <a:r>
+              <a:rPr lang="zh-CN" altLang="en-US"/>
+              <a:t>回车后的处理，</a:t>
+            </a:r>
+            <a:r>
+              <a:rPr lang="zh-CN" altLang="en-US"/>
+              <a:t>包括检验是否完整，是否合法，确定格子的</a:t>
+            </a:r>
+            <a:r>
+              <a:rPr lang="zh-CN" altLang="en-US"/>
+              <a:t>颜色</a:t>
+            </a:r>
+            <a:endParaRPr lang="zh-CN" altLang="en-US"/>
+          </a:p>
+        </p:txBody>
+      </p:sp>
+      <p:sp>
+        <p:nvSpPr>
+          <p:cNvPr id="11" name="文本框 10"/>
+          <p:cNvSpPr txBox="1"/>
+          <p:nvPr/>
+        </p:nvSpPr>
+        <p:spPr>
+          <a:xfrm>
+            <a:off x="7896225" y="4695825"/>
+            <a:ext cx="4064000" cy="368300"/>
+          </a:xfrm>
+          <a:prstGeom prst="rect">
+            <a:avLst/>
+          </a:prstGeom>
+          <a:noFill/>
+        </p:spPr>
+        <p:txBody>
+          <a:bodyPr wrap="square" rtlCol="0">
+            <a:spAutoFit/>
+          </a:bodyPr>
+          <a:p>
+            <a:r>
+              <a:rPr lang="zh-CN" altLang="en-US"/>
+              <a:t>四</a:t>
+            </a:r>
+            <a:r>
+              <a:rPr lang="en-US" altLang="zh-CN"/>
+              <a:t>.</a:t>
+            </a:r>
+            <a:r>
+              <a:rPr lang="zh-CN" altLang="en-US"/>
+              <a:t>判定胜负状态，与</a:t>
+            </a:r>
+            <a:r>
+              <a:rPr lang="zh-CN" altLang="en-US"/>
+              <a:t>反馈</a:t>
+            </a:r>
+            <a:endParaRPr lang="zh-CN" altLang="en-US"/>
+          </a:p>
+        </p:txBody>
+      </p:sp>
+    </p:spTree>
+  </p:cSld>
+  <p:clrMapOvr>
+    <a:masterClrMapping/>
+  </p:clrMapOvr>
+</p:sld>
+</file>
+
+<file path=ppt/slides/slide5.xml><?xml version="1.0" encoding="utf-8"?>
+<p:sld xmlns:a="http://schemas.openxmlformats.org/drawingml/2006/main" xmlns:r="http://schemas.openxmlformats.org/officeDocument/2006/relationships" xmlns:p="http://schemas.openxmlformats.org/presentationml/2006/main">
+  <p:cSld>
+    <p:spTree>
+      <p:nvGrpSpPr>
+        <p:cNvPr id="1" name=""/>
+        <p:cNvGrpSpPr/>
+        <p:nvPr/>
+      </p:nvGrpSpPr>
+      <p:grpSpPr/>
+      <p:sp>
+        <p:nvSpPr>
+          <p:cNvPr id="2" name="标题 1"/>
+          <p:cNvSpPr>
+            <a:spLocks noGrp="1"/>
+          </p:cNvSpPr>
+          <p:nvPr>
+            <p:ph type="title"/>
+          </p:nvPr>
+        </p:nvSpPr>
+        <p:spPr/>
+        <p:txBody>
+          <a:bodyPr/>
+          <a:p>
+            <a:r>
+              <a:rPr lang="zh-CN" altLang="en-US"/>
+              <a:t>项目总结：</a:t>
+            </a:r>
+            <a:r>
+              <a:rPr lang="en-US" altLang="zh-CN"/>
+              <a:t>Wordle </a:t>
+            </a:r>
+            <a:r>
+              <a:rPr lang="zh-CN" altLang="en-US"/>
+              <a:t>猜词游戏</a:t>
+            </a:r>
+            <a:endParaRPr lang="zh-CN" altLang="en-US"/>
+          </a:p>
+        </p:txBody>
+      </p:sp>
+      <p:sp>
+        <p:nvSpPr>
+          <p:cNvPr id="3" name="内容占位符 2"/>
+          <p:cNvSpPr>
+            <a:spLocks noGrp="1"/>
+          </p:cNvSpPr>
+          <p:nvPr>
+            <p:ph idx="1"/>
+          </p:nvPr>
+        </p:nvSpPr>
+        <p:spPr>
+          <a:xfrm>
+            <a:off x="838200" y="980440"/>
+            <a:ext cx="10467975" cy="5432425"/>
+          </a:xfrm>
+        </p:spPr>
+        <p:txBody>
+          <a:bodyPr>
+            <a:normAutofit fontScale="90000" lnSpcReduction="10000"/>
+          </a:bodyPr>
+          <a:p>
+            <a:r>
+              <a:rPr lang="en-US" altLang="zh-CN" b="1"/>
+              <a:t>1. </a:t>
+            </a:r>
+            <a:r>
+              <a:rPr lang="zh-CN" altLang="en-US" b="1"/>
+              <a:t>技术目标达成情况</a:t>
+            </a:r>
+            <a:endParaRPr lang="zh-CN" altLang="en-US" b="1"/>
+          </a:p>
+          <a:p>
+            <a:r>
+              <a:rPr lang="zh-CN" altLang="en-US"/>
+              <a:t>架构设计：实现了</a:t>
+            </a:r>
+            <a:r>
+              <a:rPr lang="en-US" altLang="zh-CN"/>
+              <a:t> HTML/CSS/JS </a:t>
+            </a:r>
+            <a:r>
+              <a:rPr lang="zh-CN" altLang="en-US"/>
+              <a:t>三层分离，坚持数据驱动</a:t>
+            </a:r>
+            <a:r>
+              <a:rPr lang="en-US" altLang="zh-CN"/>
+              <a:t> UI </a:t>
+            </a:r>
+            <a:r>
+              <a:rPr lang="zh-CN" altLang="en-US"/>
+              <a:t>，通过修改变量自动触发页面刷新</a:t>
+            </a:r>
+            <a:r>
+              <a:rPr lang="zh-CN" altLang="en-US"/>
+              <a:t>。</a:t>
+            </a:r>
+            <a:endParaRPr lang="zh-CN" altLang="en-US"/>
+          </a:p>
+          <a:p>
+            <a:r>
+              <a:rPr lang="zh-CN" altLang="en-US"/>
+              <a:t>核心算法：通过双重扫描进行重复字母判定，通过了</a:t>
+            </a:r>
+            <a:r>
+              <a:rPr lang="en-US" altLang="zh-CN"/>
+              <a:t> CodeWars </a:t>
+            </a:r>
+            <a:r>
+              <a:rPr lang="zh-CN" altLang="en-US"/>
+              <a:t>的测试用例。</a:t>
+            </a:r>
+            <a:endParaRPr lang="zh-CN" altLang="en-US"/>
+          </a:p>
+          <a:p>
+            <a:r>
+              <a:rPr lang="zh-CN" altLang="en-US"/>
+              <a:t>交互体验：利用异步编程优化加载流程，配合</a:t>
+            </a:r>
+            <a:r>
+              <a:rPr lang="en-US" altLang="zh-CN"/>
+              <a:t> CSS </a:t>
+            </a:r>
+            <a:r>
+              <a:rPr lang="zh-CN" altLang="en-US"/>
+              <a:t>动画实现类似原网页的反馈</a:t>
+            </a:r>
+            <a:r>
+              <a:rPr lang="zh-CN" altLang="en-US"/>
+              <a:t>情况。</a:t>
+            </a:r>
+            <a:endParaRPr lang="zh-CN" altLang="en-US"/>
+          </a:p>
+          <a:p>
+            <a:r>
+              <a:rPr lang="en-US" altLang="zh-CN" b="1"/>
+              <a:t>2. </a:t>
+            </a:r>
+            <a:r>
+              <a:rPr lang="zh-CN" altLang="en-US" b="1"/>
+              <a:t>开发中的难点</a:t>
+            </a:r>
+            <a:endParaRPr lang="zh-CN" altLang="en-US" b="1"/>
+          </a:p>
+          <a:p>
+            <a:r>
+              <a:rPr lang="zh-CN" altLang="en-US"/>
+              <a:t>挑战：单纯的一次循环无法正确处理</a:t>
+            </a:r>
+            <a:r>
+              <a:rPr lang="en-US" altLang="zh-CN"/>
+              <a:t>“</a:t>
+            </a:r>
+            <a:r>
+              <a:rPr lang="zh-CN" altLang="en-US"/>
+              <a:t>猜测词有两个</a:t>
+            </a:r>
+            <a:r>
+              <a:rPr lang="en-US" altLang="zh-CN"/>
+              <a:t> E</a:t>
+            </a:r>
+            <a:r>
+              <a:rPr lang="zh-CN" altLang="en-US"/>
+              <a:t>，答案只有一个</a:t>
+            </a:r>
+            <a:r>
+              <a:rPr lang="en-US" altLang="zh-CN"/>
+              <a:t> E”</a:t>
+            </a:r>
+            <a:r>
+              <a:rPr lang="zh-CN" altLang="en-US"/>
+              <a:t>的颜色显示。</a:t>
+            </a:r>
+            <a:endParaRPr lang="zh-CN" altLang="en-US"/>
+          </a:p>
+          <a:p>
+            <a:r>
+              <a:rPr lang="zh-CN" altLang="en-US"/>
+              <a:t>对策：设计了</a:t>
+            </a:r>
+            <a:r>
+              <a:rPr lang="en-US" altLang="zh-CN"/>
+              <a:t>“</a:t>
+            </a:r>
+            <a:r>
+              <a:rPr lang="zh-CN" altLang="en-US"/>
+              <a:t>先定绿、后定黄</a:t>
+            </a:r>
+            <a:r>
+              <a:rPr lang="en-US" altLang="zh-CN"/>
+              <a:t>”</a:t>
+            </a:r>
+            <a:r>
+              <a:rPr lang="zh-CN" altLang="en-US"/>
+              <a:t>的两步算法</a:t>
+            </a:r>
+            <a:endParaRPr lang="zh-CN" altLang="en-US"/>
+          </a:p>
+          <a:p>
+            <a:r>
+              <a:rPr lang="zh-CN" altLang="en-US"/>
+              <a:t>挑战：词库没加载完就随机选词会导致报错。</a:t>
+            </a:r>
+            <a:endParaRPr lang="en-US" altLang="zh-CN"/>
+          </a:p>
+          <a:p>
+            <a:r>
+              <a:rPr lang="zh-CN" altLang="en-US"/>
+              <a:t>对策：利用</a:t>
+            </a:r>
+            <a:r>
+              <a:rPr lang="en-US" altLang="zh-CN"/>
+              <a:t> Promise </a:t>
+            </a:r>
+            <a:r>
+              <a:rPr lang="zh-CN" altLang="en-US"/>
+              <a:t>和</a:t>
+            </a:r>
+            <a:r>
+              <a:rPr lang="en-US" altLang="zh-CN"/>
+              <a:t> await </a:t>
+            </a:r>
+            <a:r>
+              <a:rPr lang="zh-CN" altLang="en-US"/>
+              <a:t>强制要求</a:t>
+            </a:r>
+            <a:r>
+              <a:rPr lang="zh-CN" altLang="en-US"/>
+              <a:t>程序先有词库，再开游戏。</a:t>
+            </a:r>
+            <a:endParaRPr lang="zh-CN" altLang="en-US"/>
+          </a:p>
+          <a:p>
+            <a:r>
+              <a:rPr lang="en-US" altLang="zh-CN" b="1"/>
+              <a:t>3.</a:t>
+            </a:r>
+            <a:r>
+              <a:rPr lang="zh-CN" altLang="en-US" b="1"/>
+              <a:t>收获</a:t>
+            </a:r>
+            <a:endParaRPr lang="zh-CN" altLang="en-US" b="1"/>
+          </a:p>
+          <a:p>
+            <a:r>
+              <a:rPr lang="zh-CN" altLang="en-US"/>
+              <a:t>不要盲目写代码，先总结好大体框架和流程再按需进行</a:t>
+            </a:r>
+            <a:r>
+              <a:rPr lang="zh-CN" altLang="en-US"/>
+              <a:t>编码</a:t>
+            </a:r>
+            <a:endParaRPr lang="zh-CN" altLang="en-US"/>
+          </a:p>
+          <a:p>
+            <a:r>
+              <a:rPr lang="zh-CN" altLang="en-US"/>
+              <a:t>合理利用</a:t>
+            </a:r>
+            <a:r>
+              <a:rPr lang="en-US" altLang="zh-CN"/>
+              <a:t>ai</a:t>
+            </a:r>
+            <a:r>
+              <a:rPr lang="zh-CN" altLang="en-US"/>
+              <a:t>，将其作为一个高效查询工具和纠错工具，遇到疑惑或没有思路的地方向其进行询问，提高</a:t>
+            </a:r>
+            <a:r>
+              <a:rPr lang="zh-CN" altLang="en-US"/>
+              <a:t>效率</a:t>
+            </a:r>
+            <a:endParaRPr lang="zh-CN" altLang="en-US"/>
+          </a:p>
+          <a:p>
+            <a:endParaRPr lang="zh-CN" altLang="en-US"/>
+          </a:p>
+        </p:txBody>
+      </p:sp>
+    </p:spTree>
+  </p:cSld>
+  <p:clrMapOvr>
+    <a:masterClrMapping/>
+  </p:clrMapOvr>
+</p:sld>
+</file>
+
+<file path=ppt/slides/slide6.xml><?xml version="1.0" encoding="utf-8"?>
+<p:sld xmlns:a="http://schemas.openxmlformats.org/drawingml/2006/main" xmlns:r="http://schemas.openxmlformats.org/officeDocument/2006/relationships" xmlns:p="http://schemas.openxmlformats.org/presentationml/2006/main">
+  <p:cSld>
+    <p:spTree>
+      <p:nvGrpSpPr>
+        <p:cNvPr id="1" name=""/>
+        <p:cNvGrpSpPr/>
+        <p:nvPr/>
+      </p:nvGrpSpPr>
+      <p:grpSpPr/>
+      <p:sp>
+        <p:nvSpPr>
+          <p:cNvPr id="2" name="标题 1"/>
+          <p:cNvSpPr>
+            <a:spLocks noGrp="1"/>
+          </p:cNvSpPr>
+          <p:nvPr>
+            <p:ph type="title"/>
+          </p:nvPr>
+        </p:nvSpPr>
+        <p:spPr/>
+        <p:txBody>
+          <a:bodyPr/>
+          <a:p>
+            <a:r>
+              <a:rPr lang="zh-CN" altLang="en-US"/>
+              <a:t>新学期的个人规划与展望</a:t>
+            </a:r>
+            <a:endParaRPr lang="zh-CN" altLang="en-US"/>
+          </a:p>
+        </p:txBody>
+      </p:sp>
+      <p:sp>
+        <p:nvSpPr>
+          <p:cNvPr id="3" name="内容占位符 2"/>
+          <p:cNvSpPr>
+            <a:spLocks noGrp="1"/>
+          </p:cNvSpPr>
+          <p:nvPr>
+            <p:ph idx="1"/>
+          </p:nvPr>
+        </p:nvSpPr>
+        <p:spPr>
+          <a:xfrm>
+            <a:off x="977900" y="1618615"/>
+            <a:ext cx="10069830" cy="4558030"/>
+          </a:xfrm>
+        </p:spPr>
+        <p:txBody>
+          <a:bodyPr/>
+          <a:p>
+            <a:r>
+              <a:rPr lang="en-US" altLang="zh-CN"/>
+              <a:t>1. </a:t>
+            </a:r>
+            <a:r>
+              <a:rPr lang="zh-CN" altLang="en-US"/>
+              <a:t>技术</a:t>
+            </a:r>
+            <a:r>
+              <a:rPr lang="zh-CN" altLang="en-US"/>
+              <a:t>方面：</a:t>
+            </a:r>
+            <a:endParaRPr lang="zh-CN" altLang="en-US"/>
+          </a:p>
+          <a:p>
+            <a:r>
+              <a:rPr lang="zh-CN" altLang="en-US"/>
+              <a:t>完成这次作业的过程中我感受到了自己在</a:t>
+            </a:r>
+            <a:r>
+              <a:rPr lang="en-US" altLang="zh-CN"/>
+              <a:t>JS</a:t>
+            </a:r>
+            <a:r>
+              <a:rPr lang="zh-CN" altLang="en-US"/>
+              <a:t>方面的不足，所以我准备利用网络资源进行项目的实战，在实际操作的情境下查漏补缺，提高理解与</a:t>
+            </a:r>
+            <a:r>
+              <a:rPr lang="zh-CN" altLang="en-US"/>
+              <a:t>熟练度</a:t>
+            </a:r>
+            <a:endParaRPr lang="zh-CN" altLang="en-US"/>
+          </a:p>
+          <a:p>
+            <a:r>
+              <a:rPr lang="en-US" altLang="zh-CN"/>
+              <a:t>2.</a:t>
+            </a:r>
+            <a:r>
+              <a:rPr lang="zh-CN" altLang="en-US"/>
+              <a:t>新学期</a:t>
+            </a:r>
+            <a:r>
+              <a:rPr lang="zh-CN" altLang="en-US"/>
+              <a:t>规划</a:t>
+            </a:r>
+            <a:endParaRPr lang="zh-CN" altLang="en-US"/>
+          </a:p>
+          <a:p>
+            <a:r>
+              <a:rPr lang="zh-CN" altLang="en-US"/>
+              <a:t>接下来我计划学习</a:t>
+            </a:r>
+            <a:r>
+              <a:rPr lang="en-US" altLang="zh-CN"/>
+              <a:t> React </a:t>
+            </a:r>
+            <a:r>
+              <a:rPr lang="zh-CN" altLang="en-US"/>
+              <a:t>框架，并对后端进行基础的</a:t>
+            </a:r>
+            <a:r>
+              <a:rPr lang="zh-CN" altLang="en-US"/>
+              <a:t>学习</a:t>
+            </a:r>
+            <a:endParaRPr lang="zh-CN" altLang="en-US"/>
+          </a:p>
+          <a:p>
+            <a:r>
+              <a:rPr lang="zh-CN" altLang="en-US"/>
+              <a:t>简单了解</a:t>
+            </a:r>
+            <a:r>
+              <a:rPr lang="en-US" altLang="zh-CN"/>
+              <a:t>UI</a:t>
+            </a:r>
+            <a:r>
+              <a:rPr lang="zh-CN" altLang="en-US"/>
+              <a:t>相关</a:t>
+            </a:r>
+            <a:r>
+              <a:rPr lang="zh-CN" altLang="en-US"/>
+              <a:t>知识</a:t>
+            </a:r>
+            <a:endParaRPr lang="zh-CN" altLang="en-US"/>
+          </a:p>
+        </p:txBody>
+      </p:sp>
+    </p:spTree>
+  </p:cSld>
+  <p:clrMapOvr>
+    <a:masterClrMapping/>
+  </p:clrMapOvr>
+</p:sld>
+</file>
+
+<file path=ppt/slides/slide7.xml><?xml version="1.0" encoding="utf-8"?>
+<p:sld xmlns:a="http://schemas.openxmlformats.org/drawingml/2006/main" xmlns:r="http://schemas.openxmlformats.org/officeDocument/2006/relationships" xmlns:p="http://schemas.openxmlformats.org/presentationml/2006/main">
+  <p:cSld>
+    <p:spTree>
+      <p:nvGrpSpPr>
+        <p:cNvPr id="1" name=""/>
+        <p:cNvGrpSpPr/>
+        <p:nvPr/>
+      </p:nvGrpSpPr>
       <p:grpSpPr>
         <a:xfrm>
           <a:off x="0" y="0"/>
@@ -2368,14 +4022,14 @@
           <a:p>
             <a:pPr algn="ctr" rtl="0"/>
             <a:r>
-              <a:rPr lang="zh-CN" altLang="en-US" dirty="0">
+              <a:rPr lang="en-US" altLang="zh-CN" dirty="0">
                 <a:solidFill>
                   <a:srgbClr val="FF0000"/>
                 </a:solidFill>
               </a:rPr>
-              <a:t>结束语</a:t>
-            </a:r>
-            <a:endParaRPr lang="zh-CN" altLang="en-US" dirty="0">
+              <a:t>THANKS</a:t>
+            </a:r>
+            <a:endParaRPr lang="en-US" altLang="zh-CN" dirty="0">
               <a:solidFill>
                 <a:srgbClr val="FF0000"/>
               </a:solidFill>
